--- a/src/lib/files/parsers/__tests__/fixtures/sample.pptx
+++ b/src/lib/files/parsers/__tests__/fixtures/sample.pptx
@@ -35,7 +35,7 @@
           </a:p>
           <a:p>
             <a:r>
-              <a:t>C3PAO scheduling slip</a:t>
+              <a:t xml:space="preserve">C3PAO scheduling slip</a:t>
             </a:r>
           </a:p>
         </p:txBody>
